--- a/out/phase5/palette/green-pink/gallery.pptx
+++ b/out/phase5/palette/green-pink/gallery.pptx
@@ -6203,7 +6203,7 @@
                   <a:pt x="1854200" y="95250"/>
                 </a:lnTo>
                 <a:lnTo>
-                  <a:pt x="1765300" y="0"/>
+                  <a:pt x="1758950" y="0"/>
                 </a:lnTo>
                 <a:lnTo>
                   <a:pt x="95250" y="0"/>
@@ -6428,7 +6428,7 @@
                   <a:pt x="1854200" y="95250"/>
                 </a:lnTo>
                 <a:lnTo>
-                  <a:pt x="1765300" y="0"/>
+                  <a:pt x="1758950" y="0"/>
                 </a:lnTo>
                 <a:lnTo>
                   <a:pt x="95250" y="0"/>
@@ -6653,7 +6653,7 @@
                   <a:pt x="1854200" y="95250"/>
                 </a:lnTo>
                 <a:lnTo>
-                  <a:pt x="1765300" y="0"/>
+                  <a:pt x="1758950" y="0"/>
                 </a:lnTo>
                 <a:lnTo>
                   <a:pt x="95250" y="0"/>
@@ -9625,7 +9625,7 @@
         </p:nvSpPr>
         <p:spPr>
           <a:xfrm>
-            <a:off x="6604000" y="889000"/>
+            <a:off x="6604000" y="571500"/>
             <a:ext cx="5080000" cy="1016000"/>
           </a:xfrm>
           <a:prstGeom prst="rect">
@@ -9684,7 +9684,7 @@
         </p:nvSpPr>
         <p:spPr>
           <a:xfrm>
-            <a:off x="6604000" y="2108200"/>
+            <a:off x="6604000" y="1790700"/>
             <a:ext cx="762000" cy="50800"/>
           </a:xfrm>
           <a:custGeom>
@@ -9727,7 +9727,7 @@
         </p:nvSpPr>
         <p:spPr>
           <a:xfrm>
-            <a:off x="6604000" y="2489200"/>
+            <a:off x="6604000" y="2171700"/>
             <a:ext cx="5080000" cy="2311400"/>
           </a:xfrm>
           <a:prstGeom prst="rect">
@@ -11391,7 +11391,7 @@
         </p:nvSpPr>
         <p:spPr>
           <a:xfrm>
-            <a:off x="7061200" y="889000"/>
+            <a:off x="7061200" y="571500"/>
             <a:ext cx="4699000" cy="1016000"/>
           </a:xfrm>
           <a:prstGeom prst="rect">
@@ -11432,7 +11432,7 @@
         </p:nvSpPr>
         <p:spPr>
           <a:xfrm>
-            <a:off x="7061200" y="2603500"/>
+            <a:off x="7061200" y="2286000"/>
             <a:ext cx="152400" cy="152400"/>
           </a:xfrm>
           <a:custGeom>
@@ -11475,7 +11475,7 @@
         </p:nvSpPr>
         <p:spPr>
           <a:xfrm>
-            <a:off x="7366000" y="2540000"/>
+            <a:off x="7366000" y="2222500"/>
             <a:ext cx="4394200" cy="838200"/>
           </a:xfrm>
           <a:prstGeom prst="rect">
@@ -11534,7 +11534,7 @@
         </p:nvSpPr>
         <p:spPr>
           <a:xfrm>
-            <a:off x="7061200" y="3771900"/>
+            <a:off x="7061200" y="3454400"/>
             <a:ext cx="152400" cy="152400"/>
           </a:xfrm>
           <a:custGeom>
@@ -11577,7 +11577,7 @@
         </p:nvSpPr>
         <p:spPr>
           <a:xfrm>
-            <a:off x="7366000" y="3708400"/>
+            <a:off x="7366000" y="3390900"/>
             <a:ext cx="4394200" cy="838200"/>
           </a:xfrm>
           <a:prstGeom prst="rect">
@@ -11636,7 +11636,7 @@
         </p:nvSpPr>
         <p:spPr>
           <a:xfrm>
-            <a:off x="7061200" y="4940300"/>
+            <a:off x="7061200" y="4622800"/>
             <a:ext cx="152400" cy="152400"/>
           </a:xfrm>
           <a:custGeom>
@@ -11679,7 +11679,7 @@
         </p:nvSpPr>
         <p:spPr>
           <a:xfrm>
-            <a:off x="7366000" y="4876800"/>
+            <a:off x="7366000" y="4559300"/>
             <a:ext cx="4394200" cy="838200"/>
           </a:xfrm>
           <a:prstGeom prst="rect">
